--- a/docs/07-DP후보안/DP03-A2A-협상-메시지-구조.pptx
+++ b/docs/07-DP후보안/DP03-A2A-협상-메시지-구조.pptx
@@ -2924,7 +2924,7 @@
                 <a:ea typeface="Arial" pitchFamily="34" charset="-122"/>
                 <a:cs typeface="Arial" pitchFamily="34" charset="-120"/>
               </a:rPr>
-              <a:t>추가 위험: 고정/양보 표식의 반복·누적 노출에 의한 사유 추론</a:t>
+              <a:t>추가 위험: 고정/양보 축이라는 선호 정보의 외부 공개</a:t>
             </a:r>
             <a:endParaRPr lang="en-US" sz="700" dirty="0"/>
           </a:p>
